--- a/Email_Lead_Scoring_Project_Summary.pptx
+++ b/Email_Lead_Scoring_Project_Summary.pptx
@@ -22148,7 +22148,7 @@
                   <a:srgbClr val="1E2761"/>
                 </a:solidFill>
               </a:rPr>
-              <a:t>https://frontend-els-741818216556.us-central1.run.app/</a:t>
+              <a:t>https://frontend-els-710930172854.us-central1.run.app/</a:t>
             </a:r>
           </a:p>
         </p:txBody>
